--- a/decks/02-workshop.pptx
+++ b/decks/02-workshop.pptx
@@ -10332,7 +10332,7 @@
                 </a:solidFill>
                 <a:latin typeface="Arial"/>
               </a:rPr>
-              <a:t>Use the lowest rung that works.</a:t>
+              <a:t>Start small.</a:t>
             </a:r>
           </a:p>
           <a:p>
@@ -10355,7 +10355,7 @@
                 </a:solidFill>
                 <a:latin typeface="Arial"/>
               </a:rPr>
-              <a:t>Document everything.</a:t>
+              <a:t>Write it down.</a:t>
             </a:r>
           </a:p>
           <a:p>
@@ -10378,7 +10378,7 @@
                 </a:solidFill>
                 <a:latin typeface="Arial"/>
               </a:rPr>
-              <a:t>Trust nothing you haven't checked.</a:t>
+              <a:t>Verify before you trust.</a:t>
             </a:r>
           </a:p>
         </p:txBody>
